--- a/officecanvas/src/test/resources/pptx_samples/pptx_features.pptx
+++ b/officecanvas/src/test/resources/pptx_samples/pptx_features.pptx
@@ -13,6 +13,7 @@
     <p:sldId id="261" r:id="rId12"/>
     <p:sldId id="262" r:id="rId13"/>
     <p:sldId id="263" r:id="rId14"/>
+    <p:sldId id="264" r:id="rId15"/>
   </p:sldIdLst>
   <p:sldSz cx="9144000" cy="6858000" type="screen4x3"/>
   <p:notesSz cx="6858000" cy="9144000"/>
@@ -3904,6 +3905,152 @@
 </file>
 
 <file path=ppt/slides/slide8.xml><?xml version="1.0" encoding="utf-8"?>
+<p:sld xmlns:a="http://schemas.openxmlformats.org/drawingml/2006/main" xmlns:p="http://schemas.openxmlformats.org/presentationml/2006/main" xmlns:r="http://schemas.openxmlformats.org/officeDocument/2006/relationships">
+  <p:cSld>
+    <p:spTree>
+      <p:nvGrpSpPr>
+        <p:cNvPr id="1" name=""/>
+        <p:cNvGrpSpPr/>
+        <p:nvPr/>
+      </p:nvGrpSpPr>
+      <p:grpSpPr/>
+      <p:sp>
+        <p:nvSpPr>
+          <p:cNvPr id="2" name="Rectangle 1"/>
+          <p:cNvSpPr/>
+          <p:nvPr/>
+        </p:nvSpPr>
+        <p:spPr>
+          <a:xfrm>
+            <a:off x="914400" y="914400"/>
+            <a:ext cx="2743200" cy="1828800"/>
+          </a:xfrm>
+          <a:prstGeom prst="rect">
+            <a:avLst/>
+          </a:prstGeom>
+          <a:solidFill>
+            <a:srgbClr val="FFFFFF"/>
+          </a:solidFill>
+          <a:ln>
+            <a:noFill/>
+          </a:ln>
+          <a:effectLst>
+            <a:outerShdw blurRad="0" dist="152400" dir="2700000" rotWithShape="0">
+              <a:srgbClr val="000000"/>
+            </a:outerShdw>
+          </a:effectLst>
+        </p:spPr>
+        <p:style>
+          <a:lnRef idx="1">
+            <a:schemeClr val="accent1"/>
+          </a:lnRef>
+          <a:fillRef idx="3">
+            <a:schemeClr val="accent1"/>
+          </a:fillRef>
+          <a:effectRef idx="2">
+            <a:schemeClr val="accent1"/>
+          </a:effectRef>
+          <a:fontRef idx="minor">
+            <a:schemeClr val="lt1"/>
+          </a:fontRef>
+        </p:style>
+        <p:txBody>
+          <a:bodyPr rtlCol="0" anchor="ctr"/>
+          <a:lstStyle/>
+          <a:p>
+            <a:pPr algn="ctr"/>
+          </a:p>
+        </p:txBody>
+      </p:sp>
+      <p:sp>
+        <p:nvSpPr>
+          <p:cNvPr id="3" name="Rectangle 2"/>
+          <p:cNvSpPr/>
+          <p:nvPr/>
+        </p:nvSpPr>
+        <p:spPr>
+          <a:xfrm>
+            <a:off x="5029200" y="914400"/>
+            <a:ext cx="2743200" cy="1828800"/>
+          </a:xfrm>
+          <a:prstGeom prst="rect">
+            <a:avLst/>
+          </a:prstGeom>
+          <a:solidFill>
+            <a:srgbClr val="FFFFFF"/>
+          </a:solidFill>
+          <a:ln>
+            <a:noFill/>
+          </a:ln>
+          <a:effectLst/>
+        </p:spPr>
+        <p:style>
+          <a:lnRef idx="1">
+            <a:schemeClr val="accent1"/>
+          </a:lnRef>
+          <a:fillRef idx="3">
+            <a:schemeClr val="accent1"/>
+          </a:fillRef>
+          <a:effectRef idx="2">
+            <a:schemeClr val="accent1"/>
+          </a:effectRef>
+          <a:fontRef idx="minor">
+            <a:schemeClr val="lt1"/>
+          </a:fontRef>
+        </p:style>
+        <p:txBody>
+          <a:bodyPr rtlCol="0" anchor="ctr"/>
+          <a:lstStyle/>
+          <a:p>
+            <a:pPr algn="ctr"/>
+          </a:p>
+        </p:txBody>
+      </p:sp>
+      <p:sp>
+        <p:nvSpPr>
+          <p:cNvPr id="4" name="TextBox 3"/>
+          <p:cNvSpPr txBox="1"/>
+          <p:nvPr/>
+        </p:nvSpPr>
+        <p:spPr>
+          <a:xfrm>
+            <a:off x="914400" y="4114800"/>
+            <a:ext cx="7315200" cy="914400"/>
+          </a:xfrm>
+          <a:prstGeom prst="rect">
+            <a:avLst/>
+          </a:prstGeom>
+          <a:noFill/>
+        </p:spPr>
+        <p:txBody>
+          <a:bodyPr wrap="none">
+            <a:spAutoFit/>
+          </a:bodyPr>
+          <a:lstStyle/>
+          <a:p>
+            <a:r>
+              <a:rPr sz="4000">
+                <a:solidFill>
+                  <a:srgbClr val="FFFFFF"/>
+                </a:solidFill>
+                <a:highlight>
+                  <a:srgbClr val="FFC000"/>
+                </a:highlight>
+              </a:rPr>
+              <a:t>highlighted</a:t>
+            </a:r>
+          </a:p>
+        </p:txBody>
+      </p:sp>
+    </p:spTree>
+  </p:cSld>
+  <p:clrMapOvr>
+    <a:masterClrMapping/>
+  </p:clrMapOvr>
+</p:sld>
+</file>
+
+<file path=ppt/slides/slide9.xml><?xml version="1.0" encoding="utf-8"?>
 <p:sld xmlns:a="http://schemas.openxmlformats.org/drawingml/2006/main" xmlns:p="http://schemas.openxmlformats.org/presentationml/2006/main" xmlns:r="http://schemas.openxmlformats.org/officeDocument/2006/relationships" show="0">
   <p:cSld>
     <p:spTree>

--- a/officecanvas/src/test/resources/pptx_samples/pptx_features.pptx
+++ b/officecanvas/src/test/resources/pptx_samples/pptx_features.pptx
@@ -3886,6 +3886,87 @@
                     <a:p>
                       <a:r>
                         <a:t>r2c1</a:t>
+                      </a:r>
+                    </a:p>
+                  </a:txBody>
+                  <a:tcPr/>
+                </a:tc>
+              </a:tr>
+            </a:tbl>
+          </a:graphicData>
+        </a:graphic>
+      </p:graphicFrame>
+      <p:graphicFrame>
+        <p:nvGraphicFramePr>
+          <p:cNvPr id="3" name="Table 2"/>
+          <p:cNvGraphicFramePr>
+            <a:graphicFrameLocks noGrp="1"/>
+          </p:cNvGraphicFramePr>
+          <p:nvPr/>
+        </p:nvGraphicFramePr>
+        <p:xfrm>
+          <a:off x="914400" y="4114800"/>
+          <a:ext cx="3657600" cy="182880"/>
+        </p:xfrm>
+        <a:graphic>
+          <a:graphicData uri="http://schemas.openxmlformats.org/drawingml/2006/table">
+            <a:tbl>
+              <a:tblPr/>
+              <a:tblGrid>
+                <a:gridCol w="3657600"/>
+              </a:tblGrid>
+              <a:tr h="91440">
+                <a:tc>
+                  <a:txBody>
+                    <a:bodyPr/>
+                    <a:lstStyle/>
+                    <a:p>
+                      <a:r>
+                        <a:rPr sz="1800">
+                          <a:solidFill>
+                            <a:srgbClr val="000000"/>
+                          </a:solidFill>
+                        </a:rPr>
+                        <a:t>one</a:t>
+                      </a:r>
+                    </a:p>
+                    <a:p>
+                      <a:r>
+                        <a:rPr sz="1800">
+                          <a:solidFill>
+                            <a:srgbClr val="000000"/>
+                          </a:solidFill>
+                        </a:rPr>
+                        <a:t>two</a:t>
+                      </a:r>
+                    </a:p>
+                    <a:p>
+                      <a:r>
+                        <a:rPr sz="1800">
+                          <a:solidFill>
+                            <a:srgbClr val="000000"/>
+                          </a:solidFill>
+                        </a:rPr>
+                        <a:t>three</a:t>
+                      </a:r>
+                    </a:p>
+                  </a:txBody>
+                  <a:tcPr/>
+                </a:tc>
+              </a:tr>
+              <a:tr h="91440">
+                <a:tc>
+                  <a:txBody>
+                    <a:bodyPr/>
+                    <a:lstStyle/>
+                    <a:p>
+                      <a:r>
+                        <a:rPr sz="1800">
+                          <a:solidFill>
+                            <a:srgbClr val="000000"/>
+                          </a:solidFill>
+                        </a:rPr>
+                        <a:t>below</a:t>
                       </a:r>
                     </a:p>
                   </a:txBody>

--- a/officecanvas/src/test/resources/pptx_samples/pptx_features.pptx
+++ b/officecanvas/src/test/resources/pptx_samples/pptx_features.pptx
@@ -3551,6 +3551,22 @@
             </a:pPr>
             <a:r>
               <a:t>Gamma</a:t>
+            </a:r>
+          </a:p>
+          <a:p>
+            <a:pPr marL="342900" indent="-342900">
+              <a:buChar char="•"/>
+            </a:pPr>
+            <a:r>
+              <a:t>Note</a:t>
+            </a:r>
+          </a:p>
+          <a:p>
+            <a:pPr marL="342900" indent="-342900">
+              <a:buAutoNum type="arabicPeriod"/>
+            </a:pPr>
+            <a:r>
+              <a:t>Delta</a:t>
             </a:r>
           </a:p>
         </p:txBody>

--- a/officecanvas/src/test/resources/pptx_samples/pptx_features.pptx
+++ b/officecanvas/src/test/resources/pptx_samples/pptx_features.pptx
@@ -4136,6 +4136,159 @@
               </a:rPr>
               <a:t>highlighted</a:t>
             </a:r>
+          </a:p>
+        </p:txBody>
+      </p:sp>
+      <p:grpSp>
+        <p:nvGrpSpPr>
+          <p:cNvPr id="5" name="Group 4"/>
+          <p:cNvGrpSpPr/>
+          <p:nvPr/>
+        </p:nvGrpSpPr>
+        <p:grpSpPr>
+          <a:xfrm rot="5400000" flipH="1">
+            <a:off x="5486400" y="4114800"/>
+            <a:ext cx="1371600" cy="914400"/>
+            <a:chOff x="5486400" y="4114800"/>
+            <a:chExt cx="1371600" cy="914400"/>
+          </a:xfrm>
+          <a:solidFill>
+            <a:srgbClr val="C00000"/>
+          </a:solidFill>
+        </p:grpSpPr>
+        <p:sp>
+          <p:nvSpPr>
+            <p:cNvPr id="6" name="Rectangle 5"/>
+            <p:cNvSpPr/>
+            <p:nvPr/>
+          </p:nvSpPr>
+          <p:spPr>
+            <a:xfrm>
+              <a:off x="5486400" y="4114800"/>
+              <a:ext cx="914400" cy="457200"/>
+            </a:xfrm>
+            <a:prstGeom prst="rect">
+              <a:avLst/>
+            </a:prstGeom>
+            <a:grpFill/>
+            <a:ln>
+              <a:noFill/>
+            </a:ln>
+          </p:spPr>
+          <p:style>
+            <a:lnRef idx="1">
+              <a:schemeClr val="accent1"/>
+            </a:lnRef>
+            <a:fillRef idx="3">
+              <a:schemeClr val="accent1"/>
+            </a:fillRef>
+            <a:effectRef idx="2">
+              <a:schemeClr val="accent1"/>
+            </a:effectRef>
+            <a:fontRef idx="minor">
+              <a:schemeClr val="lt1"/>
+            </a:fontRef>
+          </p:style>
+          <p:txBody>
+            <a:bodyPr rtlCol="0" anchor="ctr"/>
+            <a:lstStyle/>
+            <a:p>
+              <a:pPr algn="ctr"/>
+            </a:p>
+          </p:txBody>
+        </p:sp>
+        <p:sp>
+          <p:nvSpPr>
+            <p:cNvPr id="7" name="Oval 6"/>
+            <p:cNvSpPr/>
+            <p:nvPr/>
+          </p:nvSpPr>
+          <p:spPr>
+            <a:xfrm>
+              <a:off x="6400800" y="4572000"/>
+              <a:ext cx="457200" cy="457200"/>
+            </a:xfrm>
+            <a:prstGeom prst="ellipse">
+              <a:avLst/>
+            </a:prstGeom>
+            <a:ln>
+              <a:noFill/>
+            </a:ln>
+          </p:spPr>
+          <p:style>
+            <a:lnRef idx="1">
+              <a:schemeClr val="accent1"/>
+            </a:lnRef>
+            <a:fillRef idx="3">
+              <a:schemeClr val="accent1"/>
+            </a:fillRef>
+            <a:effectRef idx="2">
+              <a:schemeClr val="accent1"/>
+            </a:effectRef>
+            <a:fontRef idx="minor">
+              <a:schemeClr val="lt1"/>
+            </a:fontRef>
+          </p:style>
+          <p:txBody>
+            <a:bodyPr rtlCol="0" anchor="ctr"/>
+            <a:lstStyle/>
+            <a:p>
+              <a:pPr algn="ctr"/>
+            </a:p>
+          </p:txBody>
+        </p:sp>
+      </p:grpSp>
+      <p:sp>
+        <p:nvSpPr>
+          <p:cNvPr id="8" name="Rectangle 7"/>
+          <p:cNvSpPr/>
+          <p:nvPr/>
+        </p:nvSpPr>
+        <p:spPr>
+          <a:xfrm>
+            <a:off x="7680960" y="4023360"/>
+            <a:ext cx="1097280" cy="1097280"/>
+          </a:xfrm>
+          <a:prstGeom prst="rect">
+            <a:avLst/>
+          </a:prstGeom>
+          <a:solidFill>
+            <a:srgbClr val="FFFFFF"/>
+          </a:solidFill>
+          <a:ln>
+            <a:noFill/>
+          </a:ln>
+          <a:scene3d>
+            <a:camera prst="orthographicFront">
+              <a:rot lat="0" lon="3600000" rev="0"/>
+            </a:camera>
+            <a:lightRig rig="threePt" dir="t"/>
+          </a:scene3d>
+          <a:sp3d extrusionH="548640">
+            <a:extrusionClr>
+              <a:srgbClr val="0000C0"/>
+            </a:extrusionClr>
+          </a:sp3d>
+        </p:spPr>
+        <p:style>
+          <a:lnRef idx="1">
+            <a:schemeClr val="accent1"/>
+          </a:lnRef>
+          <a:fillRef idx="3">
+            <a:schemeClr val="accent1"/>
+          </a:fillRef>
+          <a:effectRef idx="2">
+            <a:schemeClr val="accent1"/>
+          </a:effectRef>
+          <a:fontRef idx="minor">
+            <a:schemeClr val="lt1"/>
+          </a:fontRef>
+        </p:style>
+        <p:txBody>
+          <a:bodyPr rtlCol="0" anchor="ctr"/>
+          <a:lstStyle/>
+          <a:p>
+            <a:pPr algn="ctr"/>
           </a:p>
         </p:txBody>
       </p:sp>

--- a/officecanvas/src/test/resources/pptx_samples/pptx_features.pptx
+++ b/officecanvas/src/test/resources/pptx_samples/pptx_features.pptx
@@ -4135,6 +4135,19 @@
                 </a:highlight>
               </a:rPr>
               <a:t>highlighted</a:t>
+            </a:r>
+            <a:r>
+              <a:rPr sz="4000">
+                <a:solidFill>
+                  <a:srgbClr val="FFFFFF"/>
+                </a:solidFill>
+                <a:effectLst>
+                  <a:outerShdw blurRad="0" dist="50800" dir="2700000" rotWithShape="0">
+                    <a:srgbClr val="000000"/>
+                  </a:outerShdw>
+                </a:effectLst>
+              </a:rPr>
+              <a:t> shadowed</a:t>
             </a:r>
           </a:p>
         </p:txBody>
